--- a/docs/songs/never gonna stop singing.pptx
+++ b/docs/songs/never gonna stop singing.pptx
@@ -5,12 +5,15 @@
     <p:sldMasterId id="2147483648" r:id="rId1"/>
   </p:sldMasterIdLst>
   <p:sldIdLst>
-    <p:sldId id="521" r:id="rId2"/>
+    <p:sldId id="1558" r:id="rId2"/>
     <p:sldId id="1243" r:id="rId3"/>
     <p:sldId id="1244" r:id="rId4"/>
     <p:sldId id="1245" r:id="rId5"/>
     <p:sldId id="1246" r:id="rId6"/>
-    <p:sldId id="1247" r:id="rId7"/>
+    <p:sldId id="1559" r:id="rId7"/>
+    <p:sldId id="1560" r:id="rId8"/>
+    <p:sldId id="1247" r:id="rId9"/>
+    <p:sldId id="1561" r:id="rId10"/>
   </p:sldIdLst>
   <p:sldSz cx="9144000" cy="6858000" type="screen4x3"/>
   <p:notesSz cx="6858000" cy="9144000"/>
@@ -310,7 +313,7 @@
             <a:fld id="{26EA1CF3-4A15-4CBF-9A5A-6A56C368BE71}" type="datetimeFigureOut">
               <a:rPr lang="en-GB" smtClean="0"/>
               <a:pPr/>
-              <a:t>10/02/2025</a:t>
+              <a:t>08/06/2026</a:t>
             </a:fld>
             <a:endParaRPr lang="en-GB"/>
           </a:p>
@@ -477,7 +480,7 @@
             <a:fld id="{26EA1CF3-4A15-4CBF-9A5A-6A56C368BE71}" type="datetimeFigureOut">
               <a:rPr lang="en-GB" smtClean="0"/>
               <a:pPr/>
-              <a:t>10/02/2025</a:t>
+              <a:t>08/06/2026</a:t>
             </a:fld>
             <a:endParaRPr lang="en-GB"/>
           </a:p>
@@ -654,7 +657,7 @@
             <a:fld id="{26EA1CF3-4A15-4CBF-9A5A-6A56C368BE71}" type="datetimeFigureOut">
               <a:rPr lang="en-GB" smtClean="0"/>
               <a:pPr/>
-              <a:t>10/02/2025</a:t>
+              <a:t>08/06/2026</a:t>
             </a:fld>
             <a:endParaRPr lang="en-GB"/>
           </a:p>
@@ -821,7 +824,7 @@
             <a:fld id="{26EA1CF3-4A15-4CBF-9A5A-6A56C368BE71}" type="datetimeFigureOut">
               <a:rPr lang="en-GB" smtClean="0"/>
               <a:pPr/>
-              <a:t>10/02/2025</a:t>
+              <a:t>08/06/2026</a:t>
             </a:fld>
             <a:endParaRPr lang="en-GB"/>
           </a:p>
@@ -1064,7 +1067,7 @@
             <a:fld id="{26EA1CF3-4A15-4CBF-9A5A-6A56C368BE71}" type="datetimeFigureOut">
               <a:rPr lang="en-GB" smtClean="0"/>
               <a:pPr/>
-              <a:t>10/02/2025</a:t>
+              <a:t>08/06/2026</a:t>
             </a:fld>
             <a:endParaRPr lang="en-GB"/>
           </a:p>
@@ -1349,7 +1352,7 @@
             <a:fld id="{26EA1CF3-4A15-4CBF-9A5A-6A56C368BE71}" type="datetimeFigureOut">
               <a:rPr lang="en-GB" smtClean="0"/>
               <a:pPr/>
-              <a:t>10/02/2025</a:t>
+              <a:t>08/06/2026</a:t>
             </a:fld>
             <a:endParaRPr lang="en-GB"/>
           </a:p>
@@ -1768,7 +1771,7 @@
             <a:fld id="{26EA1CF3-4A15-4CBF-9A5A-6A56C368BE71}" type="datetimeFigureOut">
               <a:rPr lang="en-GB" smtClean="0"/>
               <a:pPr/>
-              <a:t>10/02/2025</a:t>
+              <a:t>08/06/2026</a:t>
             </a:fld>
             <a:endParaRPr lang="en-GB"/>
           </a:p>
@@ -1883,7 +1886,7 @@
             <a:fld id="{26EA1CF3-4A15-4CBF-9A5A-6A56C368BE71}" type="datetimeFigureOut">
               <a:rPr lang="en-GB" smtClean="0"/>
               <a:pPr/>
-              <a:t>10/02/2025</a:t>
+              <a:t>08/06/2026</a:t>
             </a:fld>
             <a:endParaRPr lang="en-GB"/>
           </a:p>
@@ -1975,7 +1978,7 @@
             <a:fld id="{26EA1CF3-4A15-4CBF-9A5A-6A56C368BE71}" type="datetimeFigureOut">
               <a:rPr lang="en-GB" smtClean="0"/>
               <a:pPr/>
-              <a:t>10/02/2025</a:t>
+              <a:t>08/06/2026</a:t>
             </a:fld>
             <a:endParaRPr lang="en-GB"/>
           </a:p>
@@ -2249,7 +2252,7 @@
             <a:fld id="{26EA1CF3-4A15-4CBF-9A5A-6A56C368BE71}" type="datetimeFigureOut">
               <a:rPr lang="en-GB" smtClean="0"/>
               <a:pPr/>
-              <a:t>10/02/2025</a:t>
+              <a:t>08/06/2026</a:t>
             </a:fld>
             <a:endParaRPr lang="en-GB"/>
           </a:p>
@@ -2499,7 +2502,7 @@
             <a:fld id="{26EA1CF3-4A15-4CBF-9A5A-6A56C368BE71}" type="datetimeFigureOut">
               <a:rPr lang="en-GB" smtClean="0"/>
               <a:pPr/>
-              <a:t>10/02/2025</a:t>
+              <a:t>08/06/2026</a:t>
             </a:fld>
             <a:endParaRPr lang="en-GB"/>
           </a:p>
@@ -2712,7 +2715,7 @@
             <a:fld id="{26EA1CF3-4A15-4CBF-9A5A-6A56C368BE71}" type="datetimeFigureOut">
               <a:rPr lang="en-GB" smtClean="0"/>
               <a:pPr/>
-              <a:t>10/02/2025</a:t>
+              <a:t>08/06/2026</a:t>
             </a:fld>
             <a:endParaRPr lang="en-GB"/>
           </a:p>
@@ -3415,7 +3418,7 @@
                   <a:schemeClr val="bg1"/>
                 </a:solidFill>
               </a:rPr>
-              <a:t>1/5</a:t>
+              <a:t>1/8</a:t>
             </a:r>
           </a:p>
         </p:txBody>
@@ -3577,7 +3580,7 @@
                   <a:schemeClr val="bg1"/>
                 </a:solidFill>
               </a:rPr>
-              <a:t>2/5</a:t>
+              <a:t>2/8</a:t>
             </a:r>
           </a:p>
         </p:txBody>
@@ -3792,7 +3795,7 @@
                   <a:schemeClr val="bg1"/>
                 </a:solidFill>
               </a:rPr>
-              <a:t>3/5</a:t>
+              <a:t>3/8</a:t>
             </a:r>
           </a:p>
         </p:txBody>
@@ -3918,7 +3921,7 @@
                   <a:schemeClr val="bg1"/>
                 </a:solidFill>
               </a:rPr>
-              <a:t>4/5</a:t>
+              <a:t>4/8</a:t>
             </a:r>
           </a:p>
         </p:txBody>
@@ -3941,6 +3944,419 @@
   <p:cSld>
     <p:spTree>
       <p:nvGrpSpPr>
+        <p:cNvPr id="1" name="">
+          <a:extLst>
+            <a:ext uri="{FF2B5EF4-FFF2-40B4-BE49-F238E27FC236}">
+              <a16:creationId xmlns:a16="http://schemas.microsoft.com/office/drawing/2014/main" id="{5A920EB1-AEDF-8452-26A1-A699D8A1BFCE}"/>
+            </a:ext>
+          </a:extLst>
+        </p:cNvPr>
+        <p:cNvGrpSpPr/>
+        <p:nvPr/>
+      </p:nvGrpSpPr>
+      <p:grpSpPr>
+        <a:xfrm>
+          <a:off x="0" y="0"/>
+          <a:ext cx="0" cy="0"/>
+          <a:chOff x="0" y="0"/>
+          <a:chExt cx="0" cy="0"/>
+        </a:xfrm>
+      </p:grpSpPr>
+      <p:sp>
+        <p:nvSpPr>
+          <p:cNvPr id="3" name="Subtitle 2">
+            <a:extLst>
+              <a:ext uri="{FF2B5EF4-FFF2-40B4-BE49-F238E27FC236}">
+                <a16:creationId xmlns:a16="http://schemas.microsoft.com/office/drawing/2014/main" id="{EF0699CD-9B73-3853-F532-7C1997796402}"/>
+              </a:ext>
+            </a:extLst>
+          </p:cNvPr>
+          <p:cNvSpPr>
+            <a:spLocks noGrp="1"/>
+          </p:cNvSpPr>
+          <p:nvPr>
+            <p:ph type="subTitle" idx="1"/>
+          </p:nvPr>
+        </p:nvSpPr>
+        <p:spPr>
+          <a:xfrm>
+            <a:off x="203118" y="836712"/>
+            <a:ext cx="8640960" cy="6480720"/>
+          </a:xfrm>
+        </p:spPr>
+        <p:txBody>
+          <a:bodyPr>
+            <a:noAutofit/>
+          </a:bodyPr>
+          <a:lstStyle/>
+          <a:p>
+            <a:r>
+              <a:rPr lang="en-GB" sz="3600" dirty="0">
+                <a:solidFill>
+                  <a:schemeClr val="bg1"/>
+                </a:solidFill>
+              </a:rPr>
+              <a:t>You conquered the grave</a:t>
+            </a:r>
+          </a:p>
+          <a:p>
+            <a:r>
+              <a:rPr lang="en-GB" sz="3600" dirty="0">
+                <a:solidFill>
+                  <a:schemeClr val="bg1"/>
+                </a:solidFill>
+              </a:rPr>
+              <a:t>You crossed the divide</a:t>
+            </a:r>
+          </a:p>
+          <a:p>
+            <a:r>
+              <a:rPr lang="en-GB" sz="3600" dirty="0">
+                <a:solidFill>
+                  <a:schemeClr val="bg1"/>
+                </a:solidFill>
+              </a:rPr>
+              <a:t>Lost in our sin You made us alive</a:t>
+            </a:r>
+          </a:p>
+          <a:p>
+            <a:r>
+              <a:rPr lang="en-GB" sz="3600" dirty="0">
+                <a:solidFill>
+                  <a:schemeClr val="bg1"/>
+                </a:solidFill>
+              </a:rPr>
+              <a:t>How can we ever hold it inside</a:t>
+            </a:r>
+          </a:p>
+          <a:p>
+            <a:r>
+              <a:rPr lang="en-GB" sz="3600" dirty="0">
+                <a:solidFill>
+                  <a:schemeClr val="bg1"/>
+                </a:solidFill>
+              </a:rPr>
+              <a:t>We can't hold back</a:t>
+            </a:r>
+          </a:p>
+          <a:p>
+            <a:r>
+              <a:rPr lang="en-GB" sz="3600" dirty="0">
+                <a:solidFill>
+                  <a:schemeClr val="bg1"/>
+                </a:solidFill>
+              </a:rPr>
+              <a:t>We're </a:t>
+            </a:r>
+            <a:r>
+              <a:rPr lang="en-GB" sz="3600" dirty="0" err="1">
+                <a:solidFill>
+                  <a:schemeClr val="bg1"/>
+                </a:solidFill>
+              </a:rPr>
+              <a:t>gonna</a:t>
+            </a:r>
+            <a:r>
+              <a:rPr lang="en-GB" sz="3600" dirty="0">
+                <a:solidFill>
+                  <a:schemeClr val="bg1"/>
+                </a:solidFill>
+              </a:rPr>
+              <a:t> lift You</a:t>
+            </a:r>
+          </a:p>
+        </p:txBody>
+      </p:sp>
+      <p:sp>
+        <p:nvSpPr>
+          <p:cNvPr id="4" name="TextBox 3">
+            <a:extLst>
+              <a:ext uri="{FF2B5EF4-FFF2-40B4-BE49-F238E27FC236}">
+                <a16:creationId xmlns:a16="http://schemas.microsoft.com/office/drawing/2014/main" id="{CF2EBB87-591B-0FF3-DBD7-DF67EAFCE28E}"/>
+              </a:ext>
+            </a:extLst>
+          </p:cNvPr>
+          <p:cNvSpPr txBox="1"/>
+          <p:nvPr/>
+        </p:nvSpPr>
+        <p:spPr>
+          <a:xfrm>
+            <a:off x="8529729" y="0"/>
+            <a:ext cx="628698" cy="461665"/>
+          </a:xfrm>
+          <a:prstGeom prst="rect">
+            <a:avLst/>
+          </a:prstGeom>
+          <a:noFill/>
+        </p:spPr>
+        <p:txBody>
+          <a:bodyPr wrap="none" rtlCol="0">
+            <a:spAutoFit/>
+          </a:bodyPr>
+          <a:lstStyle/>
+          <a:p>
+            <a:r>
+              <a:rPr lang="en-GB" sz="2400" b="1" dirty="0">
+                <a:solidFill>
+                  <a:schemeClr val="bg1"/>
+                </a:solidFill>
+              </a:rPr>
+              <a:t>5/8</a:t>
+            </a:r>
+          </a:p>
+        </p:txBody>
+      </p:sp>
+    </p:spTree>
+    <p:extLst>
+      <p:ext uri="{BB962C8B-B14F-4D97-AF65-F5344CB8AC3E}">
+        <p14:creationId xmlns:p14="http://schemas.microsoft.com/office/powerpoint/2010/main" val="3403244106"/>
+      </p:ext>
+    </p:extLst>
+  </p:cSld>
+  <p:clrMapOvr>
+    <a:masterClrMapping/>
+  </p:clrMapOvr>
+</p:sld>
+</file>
+
+<file path=ppt/slides/slide7.xml><?xml version="1.0" encoding="utf-8"?>
+<p:sld xmlns:a="http://schemas.openxmlformats.org/drawingml/2006/main" xmlns:r="http://schemas.openxmlformats.org/officeDocument/2006/relationships" xmlns:p="http://schemas.openxmlformats.org/presentationml/2006/main">
+  <p:cSld>
+    <p:spTree>
+      <p:nvGrpSpPr>
+        <p:cNvPr id="1" name="">
+          <a:extLst>
+            <a:ext uri="{FF2B5EF4-FFF2-40B4-BE49-F238E27FC236}">
+              <a16:creationId xmlns:a16="http://schemas.microsoft.com/office/drawing/2014/main" id="{B57146DB-CFC1-8AF8-A8D9-0FFAEF49547D}"/>
+            </a:ext>
+          </a:extLst>
+        </p:cNvPr>
+        <p:cNvGrpSpPr/>
+        <p:nvPr/>
+      </p:nvGrpSpPr>
+      <p:grpSpPr>
+        <a:xfrm>
+          <a:off x="0" y="0"/>
+          <a:ext cx="0" cy="0"/>
+          <a:chOff x="0" y="0"/>
+          <a:chExt cx="0" cy="0"/>
+        </a:xfrm>
+      </p:grpSpPr>
+      <p:sp>
+        <p:nvSpPr>
+          <p:cNvPr id="3" name="Subtitle 2">
+            <a:extLst>
+              <a:ext uri="{FF2B5EF4-FFF2-40B4-BE49-F238E27FC236}">
+                <a16:creationId xmlns:a16="http://schemas.microsoft.com/office/drawing/2014/main" id="{CF1A0416-7EFC-C13F-A044-F8ED41247694}"/>
+              </a:ext>
+            </a:extLst>
+          </p:cNvPr>
+          <p:cNvSpPr>
+            <a:spLocks noGrp="1"/>
+          </p:cNvSpPr>
+          <p:nvPr>
+            <p:ph type="subTitle" idx="1"/>
+          </p:nvPr>
+        </p:nvSpPr>
+        <p:spPr>
+          <a:xfrm>
+            <a:off x="0" y="764704"/>
+            <a:ext cx="8640960" cy="6480720"/>
+          </a:xfrm>
+        </p:spPr>
+        <p:txBody>
+          <a:bodyPr>
+            <a:noAutofit/>
+          </a:bodyPr>
+          <a:lstStyle/>
+          <a:p>
+            <a:r>
+              <a:rPr lang="en-GB" sz="3600" dirty="0">
+                <a:solidFill>
+                  <a:schemeClr val="bg1"/>
+                </a:solidFill>
+              </a:rPr>
+              <a:t>Higher </a:t>
+            </a:r>
+            <a:r>
+              <a:rPr lang="en-GB" sz="3600" dirty="0" err="1">
+                <a:solidFill>
+                  <a:schemeClr val="bg1"/>
+                </a:solidFill>
+              </a:rPr>
+              <a:t>higher</a:t>
+            </a:r>
+            <a:endParaRPr lang="en-GB" sz="3600" dirty="0">
+              <a:solidFill>
+                <a:schemeClr val="bg1"/>
+              </a:solidFill>
+            </a:endParaRPr>
+          </a:p>
+          <a:p>
+            <a:r>
+              <a:rPr lang="en-GB" sz="3600" dirty="0">
+                <a:solidFill>
+                  <a:schemeClr val="bg1"/>
+                </a:solidFill>
+              </a:rPr>
+              <a:t>Hearts burning bright like a fire </a:t>
+            </a:r>
+            <a:r>
+              <a:rPr lang="en-GB" sz="3600" dirty="0" err="1">
+                <a:solidFill>
+                  <a:schemeClr val="bg1"/>
+                </a:solidFill>
+              </a:rPr>
+              <a:t>fire</a:t>
+            </a:r>
+            <a:endParaRPr lang="en-GB" sz="3600" dirty="0">
+              <a:solidFill>
+                <a:schemeClr val="bg1"/>
+              </a:solidFill>
+            </a:endParaRPr>
+          </a:p>
+          <a:p>
+            <a:r>
+              <a:rPr lang="en-GB" sz="3600" dirty="0">
+                <a:solidFill>
+                  <a:schemeClr val="bg1"/>
+                </a:solidFill>
+              </a:rPr>
+              <a:t>Voices unite make it louder </a:t>
+            </a:r>
+            <a:r>
+              <a:rPr lang="en-GB" sz="3600" dirty="0" err="1">
+                <a:solidFill>
+                  <a:schemeClr val="bg1"/>
+                </a:solidFill>
+              </a:rPr>
+              <a:t>louder</a:t>
+            </a:r>
+            <a:endParaRPr lang="en-GB" sz="3600" dirty="0">
+              <a:solidFill>
+                <a:schemeClr val="bg1"/>
+              </a:solidFill>
+            </a:endParaRPr>
+          </a:p>
+          <a:p>
+            <a:r>
+              <a:rPr lang="en-GB" sz="3600" dirty="0">
+                <a:solidFill>
+                  <a:schemeClr val="bg1"/>
+                </a:solidFill>
+              </a:rPr>
+              <a:t>We're never </a:t>
+            </a:r>
+            <a:r>
+              <a:rPr lang="en-GB" sz="3600" dirty="0" err="1">
+                <a:solidFill>
+                  <a:schemeClr val="bg1"/>
+                </a:solidFill>
+              </a:rPr>
+              <a:t>gonna</a:t>
+            </a:r>
+            <a:r>
+              <a:rPr lang="en-GB" sz="3600" dirty="0">
+                <a:solidFill>
+                  <a:schemeClr val="bg1"/>
+                </a:solidFill>
+              </a:rPr>
+              <a:t> stop singing</a:t>
+            </a:r>
+          </a:p>
+          <a:p>
+            <a:r>
+              <a:rPr lang="en-GB" sz="3600" dirty="0" err="1">
+                <a:solidFill>
+                  <a:schemeClr val="bg1"/>
+                </a:solidFill>
+              </a:rPr>
+              <a:t>Oo</a:t>
+            </a:r>
+            <a:r>
+              <a:rPr lang="en-GB" sz="3600" dirty="0">
+                <a:solidFill>
+                  <a:schemeClr val="bg1"/>
+                </a:solidFill>
+              </a:rPr>
+              <a:t> we're never </a:t>
+            </a:r>
+            <a:r>
+              <a:rPr lang="en-GB" sz="3600" dirty="0" err="1">
+                <a:solidFill>
+                  <a:schemeClr val="bg1"/>
+                </a:solidFill>
+              </a:rPr>
+              <a:t>gonna</a:t>
+            </a:r>
+            <a:r>
+              <a:rPr lang="en-GB" sz="3600" dirty="0">
+                <a:solidFill>
+                  <a:schemeClr val="bg1"/>
+                </a:solidFill>
+              </a:rPr>
+              <a:t> stop (singing)</a:t>
+            </a:r>
+          </a:p>
+        </p:txBody>
+      </p:sp>
+      <p:sp>
+        <p:nvSpPr>
+          <p:cNvPr id="4" name="TextBox 3">
+            <a:extLst>
+              <a:ext uri="{FF2B5EF4-FFF2-40B4-BE49-F238E27FC236}">
+                <a16:creationId xmlns:a16="http://schemas.microsoft.com/office/drawing/2014/main" id="{42C7FB3A-5E9A-BD03-EFF8-76B44307C2CF}"/>
+              </a:ext>
+            </a:extLst>
+          </p:cNvPr>
+          <p:cNvSpPr txBox="1"/>
+          <p:nvPr/>
+        </p:nvSpPr>
+        <p:spPr>
+          <a:xfrm>
+            <a:off x="8529729" y="0"/>
+            <a:ext cx="628698" cy="461665"/>
+          </a:xfrm>
+          <a:prstGeom prst="rect">
+            <a:avLst/>
+          </a:prstGeom>
+          <a:noFill/>
+        </p:spPr>
+        <p:txBody>
+          <a:bodyPr wrap="none" rtlCol="0">
+            <a:spAutoFit/>
+          </a:bodyPr>
+          <a:lstStyle/>
+          <a:p>
+            <a:r>
+              <a:rPr lang="en-GB" sz="2400" b="1" dirty="0">
+                <a:solidFill>
+                  <a:schemeClr val="bg1"/>
+                </a:solidFill>
+              </a:rPr>
+              <a:t>6/8</a:t>
+            </a:r>
+          </a:p>
+        </p:txBody>
+      </p:sp>
+    </p:spTree>
+    <p:extLst>
+      <p:ext uri="{BB962C8B-B14F-4D97-AF65-F5344CB8AC3E}">
+        <p14:creationId xmlns:p14="http://schemas.microsoft.com/office/powerpoint/2010/main" val="4255627571"/>
+      </p:ext>
+    </p:extLst>
+  </p:cSld>
+  <p:clrMapOvr>
+    <a:masterClrMapping/>
+  </p:clrMapOvr>
+</p:sld>
+</file>
+
+<file path=ppt/slides/slide8.xml><?xml version="1.0" encoding="utf-8"?>
+<p:sld xmlns:a="http://schemas.openxmlformats.org/drawingml/2006/main" xmlns:r="http://schemas.openxmlformats.org/officeDocument/2006/relationships" xmlns:p="http://schemas.openxmlformats.org/presentationml/2006/main">
+  <p:cSld>
+    <p:spTree>
+      <p:nvGrpSpPr>
         <p:cNvPr id="1" name=""/>
         <p:cNvGrpSpPr/>
         <p:nvPr/>
@@ -4104,7 +4520,7 @@
                   <a:schemeClr val="bg1"/>
                 </a:solidFill>
               </a:rPr>
-              <a:t>5/5</a:t>
+              <a:t>7/8</a:t>
             </a:r>
           </a:p>
         </p:txBody>
@@ -4113,6 +4529,239 @@
     <p:extLst>
       <p:ext uri="{BB962C8B-B14F-4D97-AF65-F5344CB8AC3E}">
         <p14:creationId xmlns:p14="http://schemas.microsoft.com/office/powerpoint/2010/main" val="3267609491"/>
+      </p:ext>
+    </p:extLst>
+  </p:cSld>
+  <p:clrMapOvr>
+    <a:masterClrMapping/>
+  </p:clrMapOvr>
+</p:sld>
+</file>
+
+<file path=ppt/slides/slide9.xml><?xml version="1.0" encoding="utf-8"?>
+<p:sld xmlns:a="http://schemas.openxmlformats.org/drawingml/2006/main" xmlns:r="http://schemas.openxmlformats.org/officeDocument/2006/relationships" xmlns:p="http://schemas.openxmlformats.org/presentationml/2006/main">
+  <p:cSld>
+    <p:spTree>
+      <p:nvGrpSpPr>
+        <p:cNvPr id="1" name="">
+          <a:extLst>
+            <a:ext uri="{FF2B5EF4-FFF2-40B4-BE49-F238E27FC236}">
+              <a16:creationId xmlns:a16="http://schemas.microsoft.com/office/drawing/2014/main" id="{E26738E1-A828-C17E-0457-8D659512B690}"/>
+            </a:ext>
+          </a:extLst>
+        </p:cNvPr>
+        <p:cNvGrpSpPr/>
+        <p:nvPr/>
+      </p:nvGrpSpPr>
+      <p:grpSpPr>
+        <a:xfrm>
+          <a:off x="0" y="0"/>
+          <a:ext cx="0" cy="0"/>
+          <a:chOff x="0" y="0"/>
+          <a:chExt cx="0" cy="0"/>
+        </a:xfrm>
+      </p:grpSpPr>
+      <p:sp>
+        <p:nvSpPr>
+          <p:cNvPr id="3" name="Subtitle 2">
+            <a:extLst>
+              <a:ext uri="{FF2B5EF4-FFF2-40B4-BE49-F238E27FC236}">
+                <a16:creationId xmlns:a16="http://schemas.microsoft.com/office/drawing/2014/main" id="{55301EFC-93BE-1774-E1A0-F4C370B7F42B}"/>
+              </a:ext>
+            </a:extLst>
+          </p:cNvPr>
+          <p:cNvSpPr>
+            <a:spLocks noGrp="1"/>
+          </p:cNvSpPr>
+          <p:nvPr>
+            <p:ph type="subTitle" idx="1"/>
+          </p:nvPr>
+        </p:nvSpPr>
+        <p:spPr>
+          <a:xfrm>
+            <a:off x="0" y="764704"/>
+            <a:ext cx="8640960" cy="6480720"/>
+          </a:xfrm>
+        </p:spPr>
+        <p:txBody>
+          <a:bodyPr>
+            <a:noAutofit/>
+          </a:bodyPr>
+          <a:lstStyle/>
+          <a:p>
+            <a:r>
+              <a:rPr lang="en-GB" sz="3600" dirty="0">
+                <a:solidFill>
+                  <a:schemeClr val="bg1"/>
+                </a:solidFill>
+              </a:rPr>
+              <a:t>Higher </a:t>
+            </a:r>
+            <a:r>
+              <a:rPr lang="en-GB" sz="3600" dirty="0" err="1">
+                <a:solidFill>
+                  <a:schemeClr val="bg1"/>
+                </a:solidFill>
+              </a:rPr>
+              <a:t>higher</a:t>
+            </a:r>
+            <a:endParaRPr lang="en-GB" sz="3600" dirty="0">
+              <a:solidFill>
+                <a:schemeClr val="bg1"/>
+              </a:solidFill>
+            </a:endParaRPr>
+          </a:p>
+          <a:p>
+            <a:r>
+              <a:rPr lang="en-GB" sz="3600" dirty="0">
+                <a:solidFill>
+                  <a:schemeClr val="bg1"/>
+                </a:solidFill>
+              </a:rPr>
+              <a:t>Hearts burning bright like a fire </a:t>
+            </a:r>
+            <a:r>
+              <a:rPr lang="en-GB" sz="3600" dirty="0" err="1">
+                <a:solidFill>
+                  <a:schemeClr val="bg1"/>
+                </a:solidFill>
+              </a:rPr>
+              <a:t>fire</a:t>
+            </a:r>
+            <a:endParaRPr lang="en-GB" sz="3600" dirty="0">
+              <a:solidFill>
+                <a:schemeClr val="bg1"/>
+              </a:solidFill>
+            </a:endParaRPr>
+          </a:p>
+          <a:p>
+            <a:r>
+              <a:rPr lang="en-GB" sz="3600" dirty="0">
+                <a:solidFill>
+                  <a:schemeClr val="bg1"/>
+                </a:solidFill>
+              </a:rPr>
+              <a:t>Voices unite make it louder </a:t>
+            </a:r>
+            <a:r>
+              <a:rPr lang="en-GB" sz="3600" dirty="0" err="1">
+                <a:solidFill>
+                  <a:schemeClr val="bg1"/>
+                </a:solidFill>
+              </a:rPr>
+              <a:t>louder</a:t>
+            </a:r>
+            <a:endParaRPr lang="en-GB" sz="3600" dirty="0">
+              <a:solidFill>
+                <a:schemeClr val="bg1"/>
+              </a:solidFill>
+            </a:endParaRPr>
+          </a:p>
+          <a:p>
+            <a:r>
+              <a:rPr lang="en-GB" sz="3600" dirty="0">
+                <a:solidFill>
+                  <a:schemeClr val="bg1"/>
+                </a:solidFill>
+              </a:rPr>
+              <a:t>We're never </a:t>
+            </a:r>
+            <a:r>
+              <a:rPr lang="en-GB" sz="3600" dirty="0" err="1">
+                <a:solidFill>
+                  <a:schemeClr val="bg1"/>
+                </a:solidFill>
+              </a:rPr>
+              <a:t>gonna</a:t>
+            </a:r>
+            <a:r>
+              <a:rPr lang="en-GB" sz="3600" dirty="0">
+                <a:solidFill>
+                  <a:schemeClr val="bg1"/>
+                </a:solidFill>
+              </a:rPr>
+              <a:t> stop singing</a:t>
+            </a:r>
+          </a:p>
+          <a:p>
+            <a:r>
+              <a:rPr lang="en-GB" sz="3600" dirty="0" err="1">
+                <a:solidFill>
+                  <a:schemeClr val="bg1"/>
+                </a:solidFill>
+              </a:rPr>
+              <a:t>Oo</a:t>
+            </a:r>
+            <a:r>
+              <a:rPr lang="en-GB" sz="3600" dirty="0">
+                <a:solidFill>
+                  <a:schemeClr val="bg1"/>
+                </a:solidFill>
+              </a:rPr>
+              <a:t> we're never </a:t>
+            </a:r>
+            <a:r>
+              <a:rPr lang="en-GB" sz="3600" dirty="0" err="1">
+                <a:solidFill>
+                  <a:schemeClr val="bg1"/>
+                </a:solidFill>
+              </a:rPr>
+              <a:t>gonna</a:t>
+            </a:r>
+            <a:r>
+              <a:rPr lang="en-GB" sz="3600" dirty="0">
+                <a:solidFill>
+                  <a:schemeClr val="bg1"/>
+                </a:solidFill>
+              </a:rPr>
+              <a:t> stop (singing)</a:t>
+            </a:r>
+          </a:p>
+        </p:txBody>
+      </p:sp>
+      <p:sp>
+        <p:nvSpPr>
+          <p:cNvPr id="4" name="TextBox 3">
+            <a:extLst>
+              <a:ext uri="{FF2B5EF4-FFF2-40B4-BE49-F238E27FC236}">
+                <a16:creationId xmlns:a16="http://schemas.microsoft.com/office/drawing/2014/main" id="{B235C3B2-EECE-417E-A128-8CB0D7BA5C54}"/>
+              </a:ext>
+            </a:extLst>
+          </p:cNvPr>
+          <p:cNvSpPr txBox="1"/>
+          <p:nvPr/>
+        </p:nvSpPr>
+        <p:spPr>
+          <a:xfrm>
+            <a:off x="8529729" y="0"/>
+            <a:ext cx="628698" cy="461665"/>
+          </a:xfrm>
+          <a:prstGeom prst="rect">
+            <a:avLst/>
+          </a:prstGeom>
+          <a:noFill/>
+        </p:spPr>
+        <p:txBody>
+          <a:bodyPr wrap="none" rtlCol="0">
+            <a:spAutoFit/>
+          </a:bodyPr>
+          <a:lstStyle/>
+          <a:p>
+            <a:r>
+              <a:rPr lang="en-GB" sz="2400" b="1" dirty="0">
+                <a:solidFill>
+                  <a:schemeClr val="bg1"/>
+                </a:solidFill>
+              </a:rPr>
+              <a:t>8/8</a:t>
+            </a:r>
+          </a:p>
+        </p:txBody>
+      </p:sp>
+    </p:spTree>
+    <p:extLst>
+      <p:ext uri="{BB962C8B-B14F-4D97-AF65-F5344CB8AC3E}">
+        <p14:creationId xmlns:p14="http://schemas.microsoft.com/office/powerpoint/2010/main" val="3748521301"/>
       </p:ext>
     </p:extLst>
   </p:cSld>
